--- a/lecons/USA/Practical Geography/USA_PRA_QT02_Data_Collection_Sources_and_Techniques.pptx
+++ b/lecons/USA/Practical Geography/USA_PRA_QT02_Data_Collection_Sources_and_Techniques.pptx
@@ -6584,7 +6584,7 @@
                 <a:ea typeface="Times New Roman" pitchFamily="34" charset="-122"/>
                 <a:cs typeface="Times New Roman" pitchFamily="34" charset="-120"/>
               </a:rPr>
-              <a:t>Quantitative Techniques 2: Data Collection: Sources and Techniques</a:t>
+              <a:t>Quantitative Techniques 2</a:t>
             </a:r>
             <a:endParaRPr lang="en-US" sz="2600" dirty="0"/>
           </a:p>
